--- a/en/slides/17-Computer_Architecture-Verm1_Part_3.pptx
+++ b/en/slides/17-Computer_Architecture-Verm1_Part_3.pptx
@@ -119,7 +119,7 @@
   <p:extLst>
     <p:ext uri="{521415D9-36F7-43E2-AB2F-B90AF26B5E84}">
       <p14:sectionLst xmlns:p14="http://schemas.microsoft.com/office/powerpoint/2010/main">
-        <p14:section name="Opening" id="{0703a3da-b53d-9c5f-ee19-cb8c39bb15f1}">
+        <p14:section name="Opening" id="{889ebe6b-0629-ffac-f99b-d21c88afb3e9}">
           <p14:sldIdLst>
             <p14:sldId id="256"/>
             <p14:sldId id="257"/>
@@ -127,14 +127,14 @@
             <p14:sldId id="259"/>
           </p14:sldIdLst>
         </p14:section>
-        <p14:section name="The design, before the code" id="{b778f291-4415-b3c4-92aa-609f65234fb6}">
+        <p14:section name="The design, before the code" id="{06752c33-7d88-e3c4-27e7-36f494583c12}">
           <p14:sldIdLst>
             <p14:sldId id="260"/>
             <p14:sldId id="261"/>
             <p14:sldId id="262"/>
           </p14:sldIdLst>
         </p14:section>
-        <p14:section name="Step 5: look at memory move" id="{9c9d38fe-e596-d06a-605c-633c37a86a00}">
+        <p14:section name="Step 5: look at memory move" id="{b0bb62aa-3de2-f281-5840-22f3d428a9db}">
           <p14:sldIdLst>
             <p14:sldId id="263"/>
             <p14:sldId id="264"/>
@@ -2689,7 +2689,63 @@
       </p:sp>
       <p:sp>
         <p:nvSpPr>
-          <p:cNvPr id="13" name="Shape 11"/>
+          <p:cNvPr id="13" name="Text 11"/>
+          <p:cNvSpPr txBox="1"/>
+          <p:nvPr/>
+        </p:nvSpPr>
+        <p:spPr>
+          <a:xfrm>
+            <a:off x="4693615" y="566928"/>
+            <a:ext cx="6949440" cy="640080"/>
+          </a:xfrm>
+          <a:prstGeom prst="rect">
+            <a:avLst/>
+          </a:prstGeom>
+          <a:noFill/>
+          <a:ln/>
+        </p:spPr>
+        <p:txBody>
+          <a:bodyPr wrap="square" lIns="0" tIns="0" rIns="0" bIns="0" rtlCol="0" anchor="t"/>
+          <a:lstStyle/>
+          <a:p>
+            <a:pPr algn="r" indent="0" marL="0">
+              <a:buNone/>
+            </a:pPr>
+            <a:r>
+              <a:rPr lang="en-US" sz="1300" dirty="0">
+                <a:solidFill>
+                  <a:srgbClr val="CFE3EA"/>
+                </a:solidFill>
+                <a:latin typeface="Calibri" pitchFamily="34" charset="0"/>
+                <a:ea typeface="Calibri" pitchFamily="34" charset="-122"/>
+                <a:cs typeface="Calibri" pitchFamily="34" charset="-120"/>
+              </a:rPr>
+              <a:t>Lecture deck. The listings, the complete program and how to test it are in the code deck:</a:t>
+            </a:r>
+            <a:endParaRPr lang="en-US" sz="1300" dirty="0"/>
+          </a:p>
+          <a:p>
+            <a:pPr algn="r" indent="0" marL="0">
+              <a:buNone/>
+            </a:pPr>
+            <a:r>
+              <a:rPr lang="en-US" sz="1300" dirty="0">
+                <a:solidFill>
+                  <a:srgbClr val="CFE3EA"/>
+                </a:solidFill>
+                <a:latin typeface="Calibri" pitchFamily="34" charset="0"/>
+                <a:ea typeface="Calibri" pitchFamily="34" charset="-122"/>
+                <a:cs typeface="Calibri" pitchFamily="34" charset="-120"/>
+              </a:rPr>
+              <a:t>17-Computer_Architecture-Verm1_Part_3-Code.pptx</a:t>
+            </a:r>
+            <a:endParaRPr lang="en-US" sz="1300" dirty="0"/>
+          </a:p>
+        </p:txBody>
+      </p:sp>
+      <p:sp>
+        <p:nvSpPr>
+          <p:cNvPr id="14" name="Shape 12"/>
           <p:cNvSpPr/>
           <p:nvPr/>
         </p:nvSpPr>
@@ -2716,7 +2772,7 @@
       </p:sp>
       <p:pic>
         <p:nvPicPr>
-          <p:cNvPr id="14" name="Image 0" descr="/Users/raffaelemontella/devel/riscv-prg32/computer-architecture-with-prg32/tools/assets/verm1_p3_play.png">    </p:cNvPr>
+          <p:cNvPr id="15" name="Image 0" descr="/Users/raffaelemontella/devel/riscv-prg32/computer-architecture-with-prg32/tools/assets/verm1_p3_play.png">    </p:cNvPr>
           <p:cNvPicPr>
             <a:picLocks noChangeAspect="1"/>
           </p:cNvPicPr>

--- a/en/slides/17-Computer_Architecture-Verm1_Part_3.pptx
+++ b/en/slides/17-Computer_Architecture-Verm1_Part_3.pptx
@@ -119,7 +119,7 @@
   <p:extLst>
     <p:ext uri="{521415D9-36F7-43E2-AB2F-B90AF26B5E84}">
       <p14:sectionLst xmlns:p14="http://schemas.microsoft.com/office/powerpoint/2010/main">
-        <p14:section name="Opening" id="{889ebe6b-0629-ffac-f99b-d21c88afb3e9}">
+        <p14:section name="Opening" id="{535693cb-6635-772a-1a37-9e81daf21991}">
           <p14:sldIdLst>
             <p14:sldId id="256"/>
             <p14:sldId id="257"/>
@@ -127,14 +127,14 @@
             <p14:sldId id="259"/>
           </p14:sldIdLst>
         </p14:section>
-        <p14:section name="The design, before the code" id="{06752c33-7d88-e3c4-27e7-36f494583c12}">
+        <p14:section name="The design, before the code" id="{1ccac3a7-1ba2-b083-64b7-ea78ddc47b58}">
           <p14:sldIdLst>
             <p14:sldId id="260"/>
             <p14:sldId id="261"/>
             <p14:sldId id="262"/>
           </p14:sldIdLst>
         </p14:section>
-        <p14:section name="Step 5: look at memory move" id="{b0bb62aa-3de2-f281-5840-22f3d428a9db}">
+        <p14:section name="Step 5: look at memory move" id="{e5cd6e3b-e683-3ca6-93df-c6fc3469c8c4}">
           <p14:sldIdLst>
             <p14:sldId id="263"/>
             <p14:sldId id="264"/>
@@ -549,6 +549,8 @@
             <a:r>
               <a:rPr lang="en-US" dirty="0"/>
               <a:t>The third tutorial turns Verm1 into a real game. Until now the worm was a single cell and nothing could go wrong. Today memory enters the project: the worm gets a body that follows the head and grows, biting itself ends the game, and the program acquires a title screen and a game-over screen. Brooks's sentence on the cover is the motto of the day: choose the data structures well, and the code almost writes itself. You will meet two of them, a ring and a map.
+Learning status: UNDERSTAND NOW, by the end of this lecture you explain it, trace it and apply it on your own; USE NOW, you follow and use the recipe today; how it works inside is explained later, or is not part of the course; UNDERSTAND LATER, recognise the name and what it is for; a later lecture explains it. A slide without a badge is context: a story, an example, a question, an exercise.
+Learning status of this lecture. UNDERSTAND NOW: arrays in memory; finite-state machines; .text, .rodata, .data; latches and flip-flops; fixed point. USE NOW: the calling convention (Lecture 18) and, used without being studied in this course, the PRG32 tools, the PRG32-QT debugger. UNDERSTAND LATER: nothing. A slide without a badge is context: a story, an example, a question, an exercise.
 For the lecturer: Third project tutorial. It uses Lectures 13 to 16: finite state machines and edge detection (13), registers that hold the previous value (14), memory as an array of bytes, addresses and indices (15), what is kept in the cartridge file and what is lost at power-off (16). The reference file is verm1/verm1_part3.S. The quotation is the second half of Brooks's remark on flowcharts and tables: with 'data structures' for 'tables' it is the motto of this part.</a:t>
             </a:r>
             <a:endParaRPr lang="en-US" dirty="0"/>
@@ -638,6 +640,7 @@
             <a:r>
               <a:rPr lang="en-US" dirty="0"/>
               <a:t>Three questions to answer with the debugger. Where is state, and what does it contain while you play and lose? Is the map consistent with the ring: does the byte at row times 40 plus column of the head contain 1? What did the fatal step see: at the lbu after the second mul in step, t1 is 1 exactly once, at the bite. The last line is a principle: a program is right when its memory is right.
+USE NOW: the PRG32-QT debugger (used, not studied, in this course).
 For the lecturer: The third question is the most instructive: s0 and s1 hold the cell the head wanted to enter, and the screen shows that it is part of the body.</a:t>
             </a:r>
             <a:endParaRPr lang="en-US" dirty="0"/>
@@ -909,6 +912,7 @@
             <a:r>
               <a:rPr lang="en-US" dirty="0"/>
               <a:t>Where you are. Verm1 is now a game, with a goal, a risk, a beginning and an end, and you can explain every line of it. It is sequential logic and memory written as a program: a machine with three states, a ring of bytes, a map. Three things are still rough: the whole screen is redrawn at every frame, the score is a row of marks, the speed never changes. The next four lectures open the machine that runs your code, and Part 4 finishes the game.
+Learning status, recap. UNDERSTAND NOW: arrays in memory; finite-state machines; .text, .rodata, .data; latches and flip-flops; fixed point. USE NOW: the calling convention (Lecture 18) and, used without being studied in this course, the PRG32 tools, the PRG32-QT debugger. UNDERSTAND LATER: nothing. A slide without a badge is context: a story, an example, a question, an exercise.
 For the lecturer: The students now have about 450 lines of assembly that they wrote and can explain. The next four lectures open the machine that runs them.</a:t>
             </a:r>
             <a:endParaRPr lang="en-US" dirty="0"/>
@@ -1264,6 +1268,7 @@
             <a:r>
               <a:rPr lang="en-US" dirty="0"/>
               <a:t>The body is stored in two arrays of 256 bytes, body_x and body_y: entry k holds the column and the row of one segment. Nothing is ever shifted. Two numbers describe the worm: head_i, the entry of the head, and length, the number of entries in use; the tail is entry head_i - length + 1. A step writes one new entry after the head and advances head_i. If the worm has eaten the tail stays; otherwise it advances too. After entry 255 comes entry 0, which is an AND with 255: the array is a ring.
+UNDERSTAND NOW: arrays in memory.
 For the lecturer: A circular buffer, the structure behind every FIFO (first in, first out) queue; the address arithmetic is that of Lecture 15. Moving a worm of 200 cells costs the same as moving one of 3. The size 256 is chosen so that the wrap is one AND: a power of two.</a:t>
             </a:r>
             <a:endParaRPr lang="en-US" dirty="0"/>
@@ -1353,6 +1358,7 @@
             <a:r>
               <a:rPr lang="en-US" dirty="0"/>
               <a:t>To know whether the new head touches the body, the program could compare it with every segment: up to 255 comparisons at each step. Instead it keeps a map of the world: one byte for each of the 960 cells, 1 if a segment is there and 0 if not. The cell in column c of row r is byte number r times 40 plus c. A step sets one byte and clears one, and the collision test becomes a single load. It is the classic exchange of memory for time. The price: map and ring must always agree.
+UNDERSTAND NOW: arrays in memory.
 For the lecturer: Memory for time: the classic exchange. The map and the ring say the same thing in two ways, and the program must keep them consistent: every write to one is paired with a write to the other.</a:t>
             </a:r>
             <a:endParaRPr lang="en-US" dirty="0"/>
@@ -1442,6 +1448,7 @@
             <a:r>
               <a:rPr lang="en-US" dirty="0"/>
               <a:t>The state diagram of the game, as in Lecture 13: TITLE goes to PLAY when A is pressed; PLAY goes to OVER when the worm bites itself; OVER goes back to TITLE when A is pressed. The table adds the action of each transition. One detail decides whether the machine works: "A pressed" means down now and up one frame ago, an edge and not a level. Otherwise holding A would run through the states one per frame.
+UNDERSTAND NOW: finite-state machines.
 For the lecturer: The diagram and the table of Lecture 13, for our game. In every other case the state does not change. Draw it on the board before showing the code: the code is a transcription.</a:t>
             </a:r>
             <a:endParaRPr lang="en-US" dirty="0"/>
@@ -1531,6 +1538,7 @@
             <a:r>
               <a:rPr lang="en-US" dirty="0"/>
               <a:t>Put a breakpoint on the first instruction of step and resume: the program now stops once per step of the worm. Open the memory at the address of body_x: after the initial 03 04 05 a new byte appears at each step. Turn downwards: body_x repeats the same column, while body_y, 256 bytes further on, counts the rows. Eat, and compare head_i and length before and after: both have grown by one. The old bytes are never erased: the ring holds the history of the last 256 steps.
+USE NOW: the PRG32-QT debugger (used, not studied, in this course).
 For the lecturer: The bytes of the old positions are never erased: the ring keeps the whole history of the last 256 steps, and length says how much of it is still worm. After 256 steps the writing starts again from the first byte.</a:t>
             </a:r>
             <a:endParaRPr lang="en-US" dirty="0"/>
@@ -1620,6 +1628,7 @@
             <a:r>
               <a:rPr lang="en-US" dirty="0"/>
               <a:t>The edge of button A, frame by frame. While A is up everything is zero. In the frame in which A goes down, s0 is 0x10 and prev_btn is still 0: the AND with the negation gives 0x10, and the transition happens. In the following frames A is still down, but prev_btn is now 0x10 too, and the result is zero. One edge, one transition, however long the button is held.
+USE NOW: the PRG32-QT debugger (used, not studied, in this course).
 For the lecturer: Put a breakpoint on and s1, s0, t1 in verm1_update, hold A and press Resume three times: s1 is 0x10 in one frame only. The test of the reference file holds A for 28 frames and checks that exactly one transition happens.</a:t>
             </a:r>
             <a:endParaRPr lang="en-US" dirty="0"/>
@@ -2796,6 +2805,420 @@
       </p:pic>
       <p:sp>
         <p:nvSpPr>
+          <p:cNvPr id="16" name="Shape 13"/>
+          <p:cNvSpPr/>
+          <p:nvPr/>
+        </p:nvSpPr>
+        <p:spPr>
+          <a:xfrm>
+            <a:off x="9690303" y="91440"/>
+            <a:ext cx="1952752" cy="274320"/>
+          </a:xfrm>
+          <a:prstGeom prst="rect">
+            <a:avLst/>
+          </a:prstGeom>
+          <a:solidFill>
+            <a:srgbClr val="F3E8FF"/>
+          </a:solidFill>
+          <a:ln w="12700">
+            <a:solidFill>
+              <a:srgbClr val="7E22CE"/>
+            </a:solidFill>
+            <a:prstDash val="dash"/>
+          </a:ln>
+        </p:spPr>
+      </p:sp>
+      <p:sp>
+        <p:nvSpPr>
+          <p:cNvPr id="17" name="Shape 14"/>
+          <p:cNvSpPr/>
+          <p:nvPr/>
+        </p:nvSpPr>
+        <p:spPr>
+          <a:xfrm>
+            <a:off x="9717735" y="128016"/>
+            <a:ext cx="45720" cy="45720"/>
+          </a:xfrm>
+          <a:prstGeom prst="rect">
+            <a:avLst/>
+          </a:prstGeom>
+          <a:solidFill>
+            <a:srgbClr val="7E22CE"/>
+          </a:solidFill>
+          <a:ln w="12700">
+            <a:solidFill>
+              <a:srgbClr val="7E22CE"/>
+            </a:solidFill>
+            <a:prstDash val="solid"/>
+          </a:ln>
+        </p:spPr>
+      </p:sp>
+      <p:sp>
+        <p:nvSpPr>
+          <p:cNvPr id="18" name="Shape 15"/>
+          <p:cNvSpPr/>
+          <p:nvPr/>
+        </p:nvSpPr>
+        <p:spPr>
+          <a:xfrm>
+            <a:off x="9717735" y="205740"/>
+            <a:ext cx="45720" cy="45720"/>
+          </a:xfrm>
+          <a:prstGeom prst="rect">
+            <a:avLst/>
+          </a:prstGeom>
+          <a:solidFill>
+            <a:srgbClr val="7E22CE"/>
+          </a:solidFill>
+          <a:ln w="12700">
+            <a:solidFill>
+              <a:srgbClr val="7E22CE"/>
+            </a:solidFill>
+            <a:prstDash val="solid"/>
+          </a:ln>
+        </p:spPr>
+      </p:sp>
+      <p:sp>
+        <p:nvSpPr>
+          <p:cNvPr id="19" name="Shape 16"/>
+          <p:cNvSpPr/>
+          <p:nvPr/>
+        </p:nvSpPr>
+        <p:spPr>
+          <a:xfrm>
+            <a:off x="9717735" y="283464"/>
+            <a:ext cx="45720" cy="45720"/>
+          </a:xfrm>
+          <a:prstGeom prst="rect">
+            <a:avLst/>
+          </a:prstGeom>
+          <a:solidFill>
+            <a:srgbClr val="7E22CE"/>
+          </a:solidFill>
+          <a:ln w="12700">
+            <a:solidFill>
+              <a:srgbClr val="7E22CE"/>
+            </a:solidFill>
+            <a:prstDash val="solid"/>
+          </a:ln>
+        </p:spPr>
+      </p:sp>
+      <p:pic>
+        <p:nvPicPr>
+          <p:cNvPr id="20" name="Image 1" descr="preencoded.png">    </p:cNvPr>
+          <p:cNvPicPr>
+            <a:picLocks noChangeAspect="1"/>
+          </p:cNvPicPr>
+          <p:nvPr/>
+        </p:nvPicPr>
+        <p:blipFill>
+          <a:blip r:embed="rId2"/>
+          <a:stretch>
+            <a:fillRect/>
+          </a:stretch>
+        </p:blipFill>
+        <p:spPr>
+          <a:xfrm>
+            <a:off x="9818319" y="128016"/>
+            <a:ext cx="201168" cy="201168"/>
+          </a:xfrm>
+          <a:prstGeom prst="rect">
+            <a:avLst/>
+          </a:prstGeom>
+        </p:spPr>
+      </p:pic>
+      <p:sp>
+        <p:nvSpPr>
+          <p:cNvPr id="21" name="Text 17"/>
+          <p:cNvSpPr txBox="1"/>
+          <p:nvPr/>
+        </p:nvSpPr>
+        <p:spPr>
+          <a:xfrm>
+            <a:off x="10074351" y="91440"/>
+            <a:ext cx="1532128" cy="274320"/>
+          </a:xfrm>
+          <a:prstGeom prst="rect">
+            <a:avLst/>
+          </a:prstGeom>
+          <a:noFill/>
+          <a:ln/>
+        </p:spPr>
+        <p:txBody>
+          <a:bodyPr wrap="square" lIns="0" tIns="0" rIns="0" bIns="0" rtlCol="0" anchor="ctr"/>
+          <a:lstStyle/>
+          <a:p>
+            <a:pPr indent="0" marL="0">
+              <a:buNone/>
+            </a:pPr>
+            <a:r>
+              <a:rPr lang="en-US" sz="1100" b="1" dirty="0">
+                <a:solidFill>
+                  <a:srgbClr val="6B21A8"/>
+                </a:solidFill>
+                <a:latin typeface="Calibri" pitchFamily="34" charset="0"/>
+                <a:ea typeface="Calibri" pitchFamily="34" charset="-122"/>
+                <a:cs typeface="Calibri" pitchFamily="34" charset="-120"/>
+              </a:rPr>
+              <a:t>UNDERSTAND LATER</a:t>
+            </a:r>
+            <a:endParaRPr lang="en-US" sz="1100" dirty="0"/>
+          </a:p>
+        </p:txBody>
+      </p:sp>
+      <p:sp>
+        <p:nvSpPr>
+          <p:cNvPr id="22" name="Shape 18"/>
+          <p:cNvSpPr/>
+          <p:nvPr/>
+        </p:nvSpPr>
+        <p:spPr>
+          <a:xfrm>
+            <a:off x="8407349" y="91440"/>
+            <a:ext cx="1173226" cy="274320"/>
+          </a:xfrm>
+          <a:prstGeom prst="rect">
+            <a:avLst/>
+          </a:prstGeom>
+          <a:solidFill>
+            <a:srgbClr val="FEF3C7"/>
+          </a:solidFill>
+          <a:ln w="12700">
+            <a:solidFill>
+              <a:srgbClr val="B45309"/>
+            </a:solidFill>
+            <a:prstDash val="solid"/>
+          </a:ln>
+        </p:spPr>
+      </p:sp>
+      <p:sp>
+        <p:nvSpPr>
+          <p:cNvPr id="23" name="Shape 19"/>
+          <p:cNvSpPr/>
+          <p:nvPr/>
+        </p:nvSpPr>
+        <p:spPr>
+          <a:xfrm>
+            <a:off x="8407349" y="91440"/>
+            <a:ext cx="27432" cy="274320"/>
+          </a:xfrm>
+          <a:prstGeom prst="rect">
+            <a:avLst/>
+          </a:prstGeom>
+          <a:solidFill>
+            <a:srgbClr val="B45309"/>
+          </a:solidFill>
+          <a:ln w="12700">
+            <a:solidFill>
+              <a:srgbClr val="B45309"/>
+            </a:solidFill>
+            <a:prstDash val="solid"/>
+          </a:ln>
+        </p:spPr>
+      </p:sp>
+      <p:sp>
+        <p:nvSpPr>
+          <p:cNvPr id="24" name="Shape 20"/>
+          <p:cNvSpPr/>
+          <p:nvPr/>
+        </p:nvSpPr>
+        <p:spPr>
+          <a:xfrm>
+            <a:off x="8462213" y="91440"/>
+            <a:ext cx="27432" cy="274320"/>
+          </a:xfrm>
+          <a:prstGeom prst="rect">
+            <a:avLst/>
+          </a:prstGeom>
+          <a:solidFill>
+            <a:srgbClr val="B45309"/>
+          </a:solidFill>
+          <a:ln w="12700">
+            <a:solidFill>
+              <a:srgbClr val="B45309"/>
+            </a:solidFill>
+            <a:prstDash val="solid"/>
+          </a:ln>
+        </p:spPr>
+      </p:sp>
+      <p:pic>
+        <p:nvPicPr>
+          <p:cNvPr id="25" name="Image 2" descr="preencoded.png">    </p:cNvPr>
+          <p:cNvPicPr>
+            <a:picLocks noChangeAspect="1"/>
+          </p:cNvPicPr>
+          <p:nvPr/>
+        </p:nvPicPr>
+        <p:blipFill>
+          <a:blip r:embed="rId3"/>
+          <a:stretch>
+            <a:fillRect/>
+          </a:stretch>
+        </p:blipFill>
+        <p:spPr>
+          <a:xfrm>
+            <a:off x="8535365" y="128016"/>
+            <a:ext cx="201168" cy="201168"/>
+          </a:xfrm>
+          <a:prstGeom prst="rect">
+            <a:avLst/>
+          </a:prstGeom>
+        </p:spPr>
+      </p:pic>
+      <p:sp>
+        <p:nvSpPr>
+          <p:cNvPr id="26" name="Text 21"/>
+          <p:cNvSpPr txBox="1"/>
+          <p:nvPr/>
+        </p:nvSpPr>
+        <p:spPr>
+          <a:xfrm>
+            <a:off x="8791397" y="91440"/>
+            <a:ext cx="752602" cy="274320"/>
+          </a:xfrm>
+          <a:prstGeom prst="rect">
+            <a:avLst/>
+          </a:prstGeom>
+          <a:noFill/>
+          <a:ln/>
+        </p:spPr>
+        <p:txBody>
+          <a:bodyPr wrap="square" lIns="0" tIns="0" rIns="0" bIns="0" rtlCol="0" anchor="ctr"/>
+          <a:lstStyle/>
+          <a:p>
+            <a:pPr indent="0" marL="0">
+              <a:buNone/>
+            </a:pPr>
+            <a:r>
+              <a:rPr lang="en-US" sz="1100" b="1" dirty="0">
+                <a:solidFill>
+                  <a:srgbClr val="92400E"/>
+                </a:solidFill>
+                <a:latin typeface="Calibri" pitchFamily="34" charset="0"/>
+                <a:ea typeface="Calibri" pitchFamily="34" charset="-122"/>
+                <a:cs typeface="Calibri" pitchFamily="34" charset="-120"/>
+              </a:rPr>
+              <a:t>USE NOW</a:t>
+            </a:r>
+            <a:endParaRPr lang="en-US" sz="1100" dirty="0"/>
+          </a:p>
+        </p:txBody>
+      </p:sp>
+      <p:sp>
+        <p:nvSpPr>
+          <p:cNvPr id="27" name="Shape 22"/>
+          <p:cNvSpPr/>
+          <p:nvPr/>
+        </p:nvSpPr>
+        <p:spPr>
+          <a:xfrm>
+            <a:off x="6518097" y="91440"/>
+            <a:ext cx="1779524" cy="274320"/>
+          </a:xfrm>
+          <a:prstGeom prst="rect">
+            <a:avLst/>
+          </a:prstGeom>
+          <a:solidFill>
+            <a:srgbClr val="E0F2FE"/>
+          </a:solidFill>
+          <a:ln w="12700">
+            <a:solidFill>
+              <a:srgbClr val="0369A1"/>
+            </a:solidFill>
+            <a:prstDash val="solid"/>
+          </a:ln>
+        </p:spPr>
+      </p:sp>
+      <p:sp>
+        <p:nvSpPr>
+          <p:cNvPr id="28" name="Shape 23"/>
+          <p:cNvSpPr/>
+          <p:nvPr/>
+        </p:nvSpPr>
+        <p:spPr>
+          <a:xfrm>
+            <a:off x="6518097" y="91440"/>
+            <a:ext cx="73152" cy="274320"/>
+          </a:xfrm>
+          <a:prstGeom prst="rect">
+            <a:avLst/>
+          </a:prstGeom>
+          <a:solidFill>
+            <a:srgbClr val="0369A1"/>
+          </a:solidFill>
+          <a:ln w="12700">
+            <a:solidFill>
+              <a:srgbClr val="0369A1"/>
+            </a:solidFill>
+            <a:prstDash val="solid"/>
+          </a:ln>
+        </p:spPr>
+      </p:sp>
+      <p:pic>
+        <p:nvPicPr>
+          <p:cNvPr id="29" name="Image 3" descr="preencoded.png">    </p:cNvPr>
+          <p:cNvPicPr>
+            <a:picLocks noChangeAspect="1"/>
+          </p:cNvPicPr>
+          <p:nvPr/>
+        </p:nvPicPr>
+        <p:blipFill>
+          <a:blip r:embed="rId4"/>
+          <a:stretch>
+            <a:fillRect/>
+          </a:stretch>
+        </p:blipFill>
+        <p:spPr>
+          <a:xfrm>
+            <a:off x="6646113" y="128016"/>
+            <a:ext cx="201168" cy="201168"/>
+          </a:xfrm>
+          <a:prstGeom prst="rect">
+            <a:avLst/>
+          </a:prstGeom>
+        </p:spPr>
+      </p:pic>
+      <p:sp>
+        <p:nvSpPr>
+          <p:cNvPr id="30" name="Text 24"/>
+          <p:cNvSpPr txBox="1"/>
+          <p:nvPr/>
+        </p:nvSpPr>
+        <p:spPr>
+          <a:xfrm>
+            <a:off x="6902145" y="91440"/>
+            <a:ext cx="1358900" cy="274320"/>
+          </a:xfrm>
+          <a:prstGeom prst="rect">
+            <a:avLst/>
+          </a:prstGeom>
+          <a:noFill/>
+          <a:ln/>
+        </p:spPr>
+        <p:txBody>
+          <a:bodyPr wrap="square" lIns="0" tIns="0" rIns="0" bIns="0" rtlCol="0" anchor="ctr"/>
+          <a:lstStyle/>
+          <a:p>
+            <a:pPr indent="0" marL="0">
+              <a:buNone/>
+            </a:pPr>
+            <a:r>
+              <a:rPr lang="en-US" sz="1100" b="1" dirty="0">
+                <a:solidFill>
+                  <a:srgbClr val="075985"/>
+                </a:solidFill>
+                <a:latin typeface="Calibri" pitchFamily="34" charset="0"/>
+                <a:ea typeface="Calibri" pitchFamily="34" charset="-122"/>
+                <a:cs typeface="Calibri" pitchFamily="34" charset="-120"/>
+              </a:rPr>
+              <a:t>UNDERSTAND NOW</a:t>
+            </a:r>
+            <a:endParaRPr lang="en-US" sz="1100" dirty="0"/>
+          </a:p>
+        </p:txBody>
+      </p:sp>
+      <p:sp>
+        <p:nvSpPr>
           <p:cNvPr id="25" name="Slide Number Placeholder 0"/>
           <p:cNvSpPr>
             <a:spLocks noGrp="1"/>
@@ -3236,6 +3659,158 @@
               <a:t>PRG32-QT: listing, registers, memory</a:t>
             </a:r>
             <a:endParaRPr lang="en-US" sz="1200" dirty="0"/>
+          </a:p>
+        </p:txBody>
+      </p:sp>
+      <p:sp>
+        <p:nvSpPr>
+          <p:cNvPr id="13" name="Shape 10"/>
+          <p:cNvSpPr/>
+          <p:nvPr/>
+        </p:nvSpPr>
+        <p:spPr>
+          <a:xfrm>
+            <a:off x="8894013" y="91440"/>
+            <a:ext cx="2749042" cy="274320"/>
+          </a:xfrm>
+          <a:prstGeom prst="rect">
+            <a:avLst/>
+          </a:prstGeom>
+          <a:solidFill>
+            <a:srgbClr val="FEF3C7"/>
+          </a:solidFill>
+          <a:ln w="12700">
+            <a:solidFill>
+              <a:srgbClr val="B45309"/>
+            </a:solidFill>
+            <a:prstDash val="solid"/>
+          </a:ln>
+        </p:spPr>
+      </p:sp>
+      <p:sp>
+        <p:nvSpPr>
+          <p:cNvPr id="14" name="Shape 11"/>
+          <p:cNvSpPr/>
+          <p:nvPr/>
+        </p:nvSpPr>
+        <p:spPr>
+          <a:xfrm>
+            <a:off x="8894013" y="91440"/>
+            <a:ext cx="27432" cy="274320"/>
+          </a:xfrm>
+          <a:prstGeom prst="rect">
+            <a:avLst/>
+          </a:prstGeom>
+          <a:solidFill>
+            <a:srgbClr val="B45309"/>
+          </a:solidFill>
+          <a:ln w="12700">
+            <a:solidFill>
+              <a:srgbClr val="B45309"/>
+            </a:solidFill>
+            <a:prstDash val="solid"/>
+          </a:ln>
+        </p:spPr>
+      </p:sp>
+      <p:sp>
+        <p:nvSpPr>
+          <p:cNvPr id="15" name="Shape 12"/>
+          <p:cNvSpPr/>
+          <p:nvPr/>
+        </p:nvSpPr>
+        <p:spPr>
+          <a:xfrm>
+            <a:off x="8948877" y="91440"/>
+            <a:ext cx="27432" cy="274320"/>
+          </a:xfrm>
+          <a:prstGeom prst="rect">
+            <a:avLst/>
+          </a:prstGeom>
+          <a:solidFill>
+            <a:srgbClr val="B45309"/>
+          </a:solidFill>
+          <a:ln w="12700">
+            <a:solidFill>
+              <a:srgbClr val="B45309"/>
+            </a:solidFill>
+            <a:prstDash val="solid"/>
+          </a:ln>
+        </p:spPr>
+      </p:sp>
+      <p:pic>
+        <p:nvPicPr>
+          <p:cNvPr id="16" name="Image 1" descr="preencoded.png">    </p:cNvPr>
+          <p:cNvPicPr>
+            <a:picLocks noChangeAspect="1"/>
+          </p:cNvPicPr>
+          <p:nvPr/>
+        </p:nvPicPr>
+        <p:blipFill>
+          <a:blip r:embed="rId2"/>
+          <a:stretch>
+            <a:fillRect/>
+          </a:stretch>
+        </p:blipFill>
+        <p:spPr>
+          <a:xfrm>
+            <a:off x="9022029" y="128016"/>
+            <a:ext cx="201168" cy="201168"/>
+          </a:xfrm>
+          <a:prstGeom prst="rect">
+            <a:avLst/>
+          </a:prstGeom>
+        </p:spPr>
+      </p:pic>
+      <p:sp>
+        <p:nvSpPr>
+          <p:cNvPr id="17" name="Text 13"/>
+          <p:cNvSpPr txBox="1"/>
+          <p:nvPr/>
+        </p:nvSpPr>
+        <p:spPr>
+          <a:xfrm>
+            <a:off x="9278061" y="91440"/>
+            <a:ext cx="2328418" cy="274320"/>
+          </a:xfrm>
+          <a:prstGeom prst="rect">
+            <a:avLst/>
+          </a:prstGeom>
+          <a:noFill/>
+          <a:ln/>
+        </p:spPr>
+        <p:txBody>
+          <a:bodyPr wrap="square" lIns="0" tIns="0" rIns="0" bIns="0" rtlCol="0" anchor="ctr"/>
+          <a:lstStyle/>
+          <a:p>
+            <a:pPr indent="0" marL="0">
+              <a:buNone/>
+            </a:pPr>
+            <a:r>
+              <a:rPr lang="en-US" sz="1100" b="1" dirty="0">
+                <a:solidFill>
+                  <a:srgbClr val="92400E"/>
+                </a:solidFill>
+                <a:latin typeface="Calibri" pitchFamily="34" charset="0"/>
+                <a:ea typeface="Calibri" pitchFamily="34" charset="-122"/>
+                <a:cs typeface="Calibri" pitchFamily="34" charset="-120"/>
+              </a:rPr>
+              <a:t>USE NOW</a:t>
+            </a:r>
+            <a:pPr indent="0" marL="0">
+              <a:buNone/>
+            </a:pPr>
+            <a:r>
+              <a:rPr lang="en-US" sz="1100" dirty="0">
+                <a:solidFill>
+                  <a:srgbClr val="92400E"/>
+                </a:solidFill>
+                <a:latin typeface="Calibri" pitchFamily="34" charset="0"/>
+                <a:ea typeface="Calibri" pitchFamily="34" charset="-122"/>
+                <a:cs typeface="Calibri" pitchFamily="34" charset="-120"/>
+              </a:rPr>
+              <a:t> · the PRG32-QT debugger</a:t>
+            </a:r>
+            <a:endParaRPr lang="en-US" sz="1100" dirty="0"/>
           </a:p>
         </p:txBody>
       </p:sp>
@@ -8545,9 +9120,59 @@
           </a:p>
         </p:txBody>
       </p:sp>
+      <p:sp>
+        <p:nvSpPr>
+          <p:cNvPr id="3" name="Shape 1"/>
+          <p:cNvSpPr/>
+          <p:nvPr/>
+        </p:nvSpPr>
+        <p:spPr>
+          <a:xfrm>
+            <a:off x="8616010" y="91440"/>
+            <a:ext cx="3027045" cy="274320"/>
+          </a:xfrm>
+          <a:prstGeom prst="rect">
+            <a:avLst/>
+          </a:prstGeom>
+          <a:solidFill>
+            <a:srgbClr val="E0F2FE"/>
+          </a:solidFill>
+          <a:ln w="12700">
+            <a:solidFill>
+              <a:srgbClr val="0369A1"/>
+            </a:solidFill>
+            <a:prstDash val="solid"/>
+          </a:ln>
+        </p:spPr>
+      </p:sp>
+      <p:sp>
+        <p:nvSpPr>
+          <p:cNvPr id="4" name="Shape 2"/>
+          <p:cNvSpPr/>
+          <p:nvPr/>
+        </p:nvSpPr>
+        <p:spPr>
+          <a:xfrm>
+            <a:off x="8616010" y="91440"/>
+            <a:ext cx="73152" cy="274320"/>
+          </a:xfrm>
+          <a:prstGeom prst="rect">
+            <a:avLst/>
+          </a:prstGeom>
+          <a:solidFill>
+            <a:srgbClr val="0369A1"/>
+          </a:solidFill>
+          <a:ln w="12700">
+            <a:solidFill>
+              <a:srgbClr val="0369A1"/>
+            </a:solidFill>
+            <a:prstDash val="solid"/>
+          </a:ln>
+        </p:spPr>
+      </p:sp>
       <p:pic>
         <p:nvPicPr>
-          <p:cNvPr id="4" name="Image 0" descr="preencoded.png">    </p:cNvPr>
+          <p:cNvPr id="5" name="Image 0" descr="preencoded.png">    </p:cNvPr>
           <p:cNvPicPr>
             <a:picLocks noChangeAspect="1"/>
           </p:cNvPicPr>
@@ -8561,17 +9186,70 @@
         </p:blipFill>
         <p:spPr>
           <a:xfrm>
-            <a:off x="548640" y="1424701"/>
-            <a:ext cx="5760720" cy="1558006"/>
+            <a:off x="8744026" y="128016"/>
+            <a:ext cx="201168" cy="201168"/>
           </a:xfrm>
           <a:prstGeom prst="rect">
             <a:avLst/>
           </a:prstGeom>
         </p:spPr>
       </p:pic>
+      <p:sp>
+        <p:nvSpPr>
+          <p:cNvPr id="6" name="Text 3"/>
+          <p:cNvSpPr txBox="1"/>
+          <p:nvPr/>
+        </p:nvSpPr>
+        <p:spPr>
+          <a:xfrm>
+            <a:off x="9000058" y="91440"/>
+            <a:ext cx="2606421" cy="274320"/>
+          </a:xfrm>
+          <a:prstGeom prst="rect">
+            <a:avLst/>
+          </a:prstGeom>
+          <a:noFill/>
+          <a:ln/>
+        </p:spPr>
+        <p:txBody>
+          <a:bodyPr wrap="square" lIns="0" tIns="0" rIns="0" bIns="0" rtlCol="0" anchor="ctr"/>
+          <a:lstStyle/>
+          <a:p>
+            <a:pPr indent="0" marL="0">
+              <a:buNone/>
+            </a:pPr>
+            <a:r>
+              <a:rPr lang="en-US" sz="1100" b="1" dirty="0">
+                <a:solidFill>
+                  <a:srgbClr val="075985"/>
+                </a:solidFill>
+                <a:latin typeface="Calibri" pitchFamily="34" charset="0"/>
+                <a:ea typeface="Calibri" pitchFamily="34" charset="-122"/>
+                <a:cs typeface="Calibri" pitchFamily="34" charset="-120"/>
+              </a:rPr>
+              <a:t>UNDERSTAND NOW</a:t>
+            </a:r>
+            <a:pPr indent="0" marL="0">
+              <a:buNone/>
+            </a:pPr>
+            <a:r>
+              <a:rPr lang="en-US" sz="1100" dirty="0">
+                <a:solidFill>
+                  <a:srgbClr val="075985"/>
+                </a:solidFill>
+                <a:latin typeface="Calibri" pitchFamily="34" charset="0"/>
+                <a:ea typeface="Calibri" pitchFamily="34" charset="-122"/>
+                <a:cs typeface="Calibri" pitchFamily="34" charset="-120"/>
+              </a:rPr>
+              <a:t> · arrays in memory</a:t>
+            </a:r>
+            <a:endParaRPr lang="en-US" sz="1100" dirty="0"/>
+          </a:p>
+        </p:txBody>
+      </p:sp>
       <p:pic>
         <p:nvPicPr>
-          <p:cNvPr id="5" name="Image 1" descr="preencoded.png">    </p:cNvPr>
+          <p:cNvPr id="8" name="Image 1" descr="preencoded.png">    </p:cNvPr>
           <p:cNvPicPr>
             <a:picLocks noChangeAspect="1"/>
           </p:cNvPicPr>
@@ -8585,7 +9263,7 @@
         </p:blipFill>
         <p:spPr>
           <a:xfrm>
-            <a:off x="548640" y="3070621"/>
+            <a:off x="548640" y="1424701"/>
             <a:ext cx="5760720" cy="1558006"/>
           </a:xfrm>
           <a:prstGeom prst="rect">
@@ -8595,7 +9273,7 @@
       </p:pic>
       <p:pic>
         <p:nvPicPr>
-          <p:cNvPr id="6" name="Image 2" descr="preencoded.png">    </p:cNvPr>
+          <p:cNvPr id="9" name="Image 2" descr="preencoded.png">    </p:cNvPr>
           <p:cNvPicPr>
             <a:picLocks noChangeAspect="1"/>
           </p:cNvPicPr>
@@ -8609,6 +9287,30 @@
         </p:blipFill>
         <p:spPr>
           <a:xfrm>
+            <a:off x="548640" y="3070621"/>
+            <a:ext cx="5760720" cy="1558006"/>
+          </a:xfrm>
+          <a:prstGeom prst="rect">
+            <a:avLst/>
+          </a:prstGeom>
+        </p:spPr>
+      </p:pic>
+      <p:pic>
+        <p:nvPicPr>
+          <p:cNvPr id="10" name="Image 3" descr="preencoded.png">    </p:cNvPr>
+          <p:cNvPicPr>
+            <a:picLocks noChangeAspect="1"/>
+          </p:cNvPicPr>
+          <p:nvPr/>
+        </p:nvPicPr>
+        <p:blipFill>
+          <a:blip r:embed="rId4"/>
+          <a:stretch>
+            <a:fillRect/>
+          </a:stretch>
+        </p:blipFill>
+        <p:spPr>
+          <a:xfrm>
             <a:off x="548640" y="4716541"/>
             <a:ext cx="5760720" cy="1558006"/>
           </a:xfrm>
@@ -8619,7 +9321,7 @@
       </p:pic>
       <p:sp>
         <p:nvSpPr>
-          <p:cNvPr id="7" name="Shape 1"/>
+          <p:cNvPr id="11" name="Shape 4"/>
           <p:cNvSpPr/>
           <p:nvPr/>
         </p:nvSpPr>
@@ -8644,7 +9346,7 @@
       </p:sp>
       <p:sp>
         <p:nvSpPr>
-          <p:cNvPr id="8" name="Text 2"/>
+          <p:cNvPr id="12" name="Text 5"/>
           <p:cNvSpPr txBox="1"/>
           <p:nvPr/>
         </p:nvSpPr>
@@ -8686,7 +9388,7 @@
       </p:sp>
       <p:sp>
         <p:nvSpPr>
-          <p:cNvPr id="9" name="Shape 3"/>
+          <p:cNvPr id="13" name="Shape 6"/>
           <p:cNvSpPr/>
           <p:nvPr/>
         </p:nvSpPr>
@@ -8711,7 +9413,7 @@
       </p:sp>
       <p:sp>
         <p:nvSpPr>
-          <p:cNvPr id="10" name="Text 4"/>
+          <p:cNvPr id="14" name="Text 7"/>
           <p:cNvSpPr txBox="1"/>
           <p:nvPr/>
         </p:nvSpPr>
@@ -8753,7 +9455,7 @@
       </p:sp>
       <p:sp>
         <p:nvSpPr>
-          <p:cNvPr id="11" name="Shape 5"/>
+          <p:cNvPr id="15" name="Shape 8"/>
           <p:cNvSpPr/>
           <p:nvPr/>
         </p:nvSpPr>
@@ -8778,7 +9480,7 @@
       </p:sp>
       <p:sp>
         <p:nvSpPr>
-          <p:cNvPr id="12" name="Text 6"/>
+          <p:cNvPr id="16" name="Text 9"/>
           <p:cNvSpPr txBox="1"/>
           <p:nvPr/>
         </p:nvSpPr>
@@ -8860,7 +9562,7 @@
       </p:sp>
       <p:sp>
         <p:nvSpPr>
-          <p:cNvPr id="13" name="Shape 7"/>
+          <p:cNvPr id="17" name="Shape 10"/>
           <p:cNvSpPr/>
           <p:nvPr/>
         </p:nvSpPr>
@@ -8885,7 +9587,7 @@
       </p:sp>
       <p:sp>
         <p:nvSpPr>
-          <p:cNvPr id="14" name="Text 8"/>
+          <p:cNvPr id="18" name="Text 11"/>
           <p:cNvSpPr txBox="1"/>
           <p:nvPr/>
         </p:nvSpPr>
@@ -8927,7 +9629,7 @@
       </p:sp>
       <p:sp>
         <p:nvSpPr>
-          <p:cNvPr id="15" name="Shape 9"/>
+          <p:cNvPr id="19" name="Shape 12"/>
           <p:cNvSpPr/>
           <p:nvPr/>
         </p:nvSpPr>
@@ -8952,7 +9654,7 @@
       </p:sp>
       <p:sp>
         <p:nvSpPr>
-          <p:cNvPr id="16" name="Text 10"/>
+          <p:cNvPr id="20" name="Text 13"/>
           <p:cNvSpPr txBox="1"/>
           <p:nvPr/>
         </p:nvSpPr>
@@ -9588,6 +10290,133 @@
       </p:sp>
       <p:sp>
         <p:nvSpPr>
+          <p:cNvPr id="16" name="Shape 14"/>
+          <p:cNvSpPr/>
+          <p:nvPr/>
+        </p:nvSpPr>
+        <p:spPr>
+          <a:xfrm>
+            <a:off x="8616010" y="91440"/>
+            <a:ext cx="3027045" cy="274320"/>
+          </a:xfrm>
+          <a:prstGeom prst="rect">
+            <a:avLst/>
+          </a:prstGeom>
+          <a:solidFill>
+            <a:srgbClr val="E0F2FE"/>
+          </a:solidFill>
+          <a:ln w="12700">
+            <a:solidFill>
+              <a:srgbClr val="0369A1"/>
+            </a:solidFill>
+            <a:prstDash val="solid"/>
+          </a:ln>
+        </p:spPr>
+      </p:sp>
+      <p:sp>
+        <p:nvSpPr>
+          <p:cNvPr id="17" name="Shape 15"/>
+          <p:cNvSpPr/>
+          <p:nvPr/>
+        </p:nvSpPr>
+        <p:spPr>
+          <a:xfrm>
+            <a:off x="8616010" y="91440"/>
+            <a:ext cx="73152" cy="274320"/>
+          </a:xfrm>
+          <a:prstGeom prst="rect">
+            <a:avLst/>
+          </a:prstGeom>
+          <a:solidFill>
+            <a:srgbClr val="0369A1"/>
+          </a:solidFill>
+          <a:ln w="12700">
+            <a:solidFill>
+              <a:srgbClr val="0369A1"/>
+            </a:solidFill>
+            <a:prstDash val="solid"/>
+          </a:ln>
+        </p:spPr>
+      </p:sp>
+      <p:pic>
+        <p:nvPicPr>
+          <p:cNvPr id="18" name="Image 0" descr="preencoded.png">    </p:cNvPr>
+          <p:cNvPicPr>
+            <a:picLocks noChangeAspect="1"/>
+          </p:cNvPicPr>
+          <p:nvPr/>
+        </p:nvPicPr>
+        <p:blipFill>
+          <a:blip r:embed="rId1"/>
+          <a:stretch>
+            <a:fillRect/>
+          </a:stretch>
+        </p:blipFill>
+        <p:spPr>
+          <a:xfrm>
+            <a:off x="8744026" y="128016"/>
+            <a:ext cx="201168" cy="201168"/>
+          </a:xfrm>
+          <a:prstGeom prst="rect">
+            <a:avLst/>
+          </a:prstGeom>
+        </p:spPr>
+      </p:pic>
+      <p:sp>
+        <p:nvSpPr>
+          <p:cNvPr id="19" name="Text 16"/>
+          <p:cNvSpPr txBox="1"/>
+          <p:nvPr/>
+        </p:nvSpPr>
+        <p:spPr>
+          <a:xfrm>
+            <a:off x="9000058" y="91440"/>
+            <a:ext cx="2606421" cy="274320"/>
+          </a:xfrm>
+          <a:prstGeom prst="rect">
+            <a:avLst/>
+          </a:prstGeom>
+          <a:noFill/>
+          <a:ln/>
+        </p:spPr>
+        <p:txBody>
+          <a:bodyPr wrap="square" lIns="0" tIns="0" rIns="0" bIns="0" rtlCol="0" anchor="ctr"/>
+          <a:lstStyle/>
+          <a:p>
+            <a:pPr indent="0" marL="0">
+              <a:buNone/>
+            </a:pPr>
+            <a:r>
+              <a:rPr lang="en-US" sz="1100" b="1" dirty="0">
+                <a:solidFill>
+                  <a:srgbClr val="075985"/>
+                </a:solidFill>
+                <a:latin typeface="Calibri" pitchFamily="34" charset="0"/>
+                <a:ea typeface="Calibri" pitchFamily="34" charset="-122"/>
+                <a:cs typeface="Calibri" pitchFamily="34" charset="-120"/>
+              </a:rPr>
+              <a:t>UNDERSTAND NOW</a:t>
+            </a:r>
+            <a:pPr indent="0" marL="0">
+              <a:buNone/>
+            </a:pPr>
+            <a:r>
+              <a:rPr lang="en-US" sz="1100" dirty="0">
+                <a:solidFill>
+                  <a:srgbClr val="075985"/>
+                </a:solidFill>
+                <a:latin typeface="Calibri" pitchFamily="34" charset="0"/>
+                <a:ea typeface="Calibri" pitchFamily="34" charset="-122"/>
+                <a:cs typeface="Calibri" pitchFamily="34" charset="-120"/>
+              </a:rPr>
+              <a:t> · arrays in memory</a:t>
+            </a:r>
+            <a:endParaRPr lang="en-US" sz="1100" dirty="0"/>
+          </a:p>
+        </p:txBody>
+      </p:sp>
+      <p:sp>
+        <p:nvSpPr>
           <p:cNvPr id="25" name="Slide Number Placeholder 0"/>
           <p:cNvSpPr>
             <a:spLocks noGrp="1"/>
@@ -9700,9 +10529,59 @@
           </a:p>
         </p:txBody>
       </p:sp>
+      <p:sp>
+        <p:nvSpPr>
+          <p:cNvPr id="3" name="Shape 1"/>
+          <p:cNvSpPr/>
+          <p:nvPr/>
+        </p:nvSpPr>
+        <p:spPr>
+          <a:xfrm>
+            <a:off x="8287715" y="91440"/>
+            <a:ext cx="3355340" cy="274320"/>
+          </a:xfrm>
+          <a:prstGeom prst="rect">
+            <a:avLst/>
+          </a:prstGeom>
+          <a:solidFill>
+            <a:srgbClr val="E0F2FE"/>
+          </a:solidFill>
+          <a:ln w="12700">
+            <a:solidFill>
+              <a:srgbClr val="0369A1"/>
+            </a:solidFill>
+            <a:prstDash val="solid"/>
+          </a:ln>
+        </p:spPr>
+      </p:sp>
+      <p:sp>
+        <p:nvSpPr>
+          <p:cNvPr id="4" name="Shape 2"/>
+          <p:cNvSpPr/>
+          <p:nvPr/>
+        </p:nvSpPr>
+        <p:spPr>
+          <a:xfrm>
+            <a:off x="8287715" y="91440"/>
+            <a:ext cx="73152" cy="274320"/>
+          </a:xfrm>
+          <a:prstGeom prst="rect">
+            <a:avLst/>
+          </a:prstGeom>
+          <a:solidFill>
+            <a:srgbClr val="0369A1"/>
+          </a:solidFill>
+          <a:ln w="12700">
+            <a:solidFill>
+              <a:srgbClr val="0369A1"/>
+            </a:solidFill>
+            <a:prstDash val="solid"/>
+          </a:ln>
+        </p:spPr>
+      </p:sp>
       <p:pic>
         <p:nvPicPr>
-          <p:cNvPr id="4" name="Image 0" descr="preencoded.png">    </p:cNvPr>
+          <p:cNvPr id="5" name="Image 0" descr="preencoded.png">    </p:cNvPr>
           <p:cNvPicPr>
             <a:picLocks noChangeAspect="1"/>
           </p:cNvPicPr>
@@ -9716,6 +10595,83 @@
         </p:blipFill>
         <p:spPr>
           <a:xfrm>
+            <a:off x="8415731" y="128016"/>
+            <a:ext cx="201168" cy="201168"/>
+          </a:xfrm>
+          <a:prstGeom prst="rect">
+            <a:avLst/>
+          </a:prstGeom>
+        </p:spPr>
+      </p:pic>
+      <p:sp>
+        <p:nvSpPr>
+          <p:cNvPr id="6" name="Text 3"/>
+          <p:cNvSpPr txBox="1"/>
+          <p:nvPr/>
+        </p:nvSpPr>
+        <p:spPr>
+          <a:xfrm>
+            <a:off x="8671763" y="91440"/>
+            <a:ext cx="2934716" cy="274320"/>
+          </a:xfrm>
+          <a:prstGeom prst="rect">
+            <a:avLst/>
+          </a:prstGeom>
+          <a:noFill/>
+          <a:ln/>
+        </p:spPr>
+        <p:txBody>
+          <a:bodyPr wrap="square" lIns="0" tIns="0" rIns="0" bIns="0" rtlCol="0" anchor="ctr"/>
+          <a:lstStyle/>
+          <a:p>
+            <a:pPr indent="0" marL="0">
+              <a:buNone/>
+            </a:pPr>
+            <a:r>
+              <a:rPr lang="en-US" sz="1100" b="1" dirty="0">
+                <a:solidFill>
+                  <a:srgbClr val="075985"/>
+                </a:solidFill>
+                <a:latin typeface="Calibri" pitchFamily="34" charset="0"/>
+                <a:ea typeface="Calibri" pitchFamily="34" charset="-122"/>
+                <a:cs typeface="Calibri" pitchFamily="34" charset="-120"/>
+              </a:rPr>
+              <a:t>UNDERSTAND NOW</a:t>
+            </a:r>
+            <a:pPr indent="0" marL="0">
+              <a:buNone/>
+            </a:pPr>
+            <a:r>
+              <a:rPr lang="en-US" sz="1100" dirty="0">
+                <a:solidFill>
+                  <a:srgbClr val="075985"/>
+                </a:solidFill>
+                <a:latin typeface="Calibri" pitchFamily="34" charset="0"/>
+                <a:ea typeface="Calibri" pitchFamily="34" charset="-122"/>
+                <a:cs typeface="Calibri" pitchFamily="34" charset="-120"/>
+              </a:rPr>
+              <a:t> · finite-state machines</a:t>
+            </a:r>
+            <a:endParaRPr lang="en-US" sz="1100" dirty="0"/>
+          </a:p>
+        </p:txBody>
+      </p:sp>
+      <p:pic>
+        <p:nvPicPr>
+          <p:cNvPr id="8" name="Image 1" descr="preencoded.png">    </p:cNvPr>
+          <p:cNvPicPr>
+            <a:picLocks noChangeAspect="1"/>
+          </p:cNvPicPr>
+          <p:nvPr/>
+        </p:nvPicPr>
+        <p:blipFill>
+          <a:blip r:embed="rId2"/>
+          <a:stretch>
+            <a:fillRect/>
+          </a:stretch>
+        </p:blipFill>
+        <p:spPr>
+          <a:xfrm>
             <a:off x="560682" y="1417320"/>
             <a:ext cx="5736635" cy="3154680"/>
           </a:xfrm>
@@ -9726,7 +10682,7 @@
       </p:pic>
       <p:sp>
         <p:nvSpPr>
-          <p:cNvPr id="5" name="Shape 1"/>
+          <p:cNvPr id="9" name="Shape 4"/>
           <p:cNvSpPr/>
           <p:nvPr/>
         </p:nvSpPr>
@@ -9751,7 +10707,7 @@
       </p:sp>
       <p:sp>
         <p:nvSpPr>
-          <p:cNvPr id="6" name="Text 2"/>
+          <p:cNvPr id="10" name="Text 5"/>
           <p:cNvSpPr txBox="1"/>
           <p:nvPr/>
         </p:nvSpPr>
@@ -9793,7 +10749,7 @@
       </p:sp>
       <p:sp>
         <p:nvSpPr>
-          <p:cNvPr id="7" name="Shape 3"/>
+          <p:cNvPr id="11" name="Shape 6"/>
           <p:cNvSpPr/>
           <p:nvPr/>
         </p:nvSpPr>
@@ -9818,7 +10774,7 @@
       </p:sp>
       <p:sp>
         <p:nvSpPr>
-          <p:cNvPr id="8" name="Text 4"/>
+          <p:cNvPr id="12" name="Text 7"/>
           <p:cNvSpPr txBox="1"/>
           <p:nvPr/>
         </p:nvSpPr>
@@ -9860,7 +10816,7 @@
       </p:sp>
       <p:sp>
         <p:nvSpPr>
-          <p:cNvPr id="9" name="Shape 5"/>
+          <p:cNvPr id="13" name="Shape 8"/>
           <p:cNvSpPr/>
           <p:nvPr/>
         </p:nvSpPr>
@@ -9885,7 +10841,7 @@
       </p:sp>
       <p:sp>
         <p:nvSpPr>
-          <p:cNvPr id="10" name="Text 6"/>
+          <p:cNvPr id="14" name="Text 9"/>
           <p:cNvSpPr txBox="1"/>
           <p:nvPr/>
         </p:nvSpPr>
@@ -9927,7 +10883,7 @@
       </p:sp>
       <p:sp>
         <p:nvSpPr>
-          <p:cNvPr id="11" name="Shape 7"/>
+          <p:cNvPr id="15" name="Shape 10"/>
           <p:cNvSpPr/>
           <p:nvPr/>
         </p:nvSpPr>
@@ -9952,7 +10908,7 @@
       </p:sp>
       <p:sp>
         <p:nvSpPr>
-          <p:cNvPr id="12" name="Text 8"/>
+          <p:cNvPr id="16" name="Text 11"/>
           <p:cNvSpPr txBox="1"/>
           <p:nvPr/>
         </p:nvSpPr>
@@ -11765,6 +12721,158 @@
               <a:t>Eat, and compare head_i and length before and after: both grow by one</a:t>
             </a:r>
             <a:endParaRPr lang="en-US" sz="2200" dirty="0"/>
+          </a:p>
+        </p:txBody>
+      </p:sp>
+      <p:sp>
+        <p:nvSpPr>
+          <p:cNvPr id="15" name="Shape 13"/>
+          <p:cNvSpPr/>
+          <p:nvPr/>
+        </p:nvSpPr>
+        <p:spPr>
+          <a:xfrm>
+            <a:off x="8894013" y="91440"/>
+            <a:ext cx="2749042" cy="274320"/>
+          </a:xfrm>
+          <a:prstGeom prst="rect">
+            <a:avLst/>
+          </a:prstGeom>
+          <a:solidFill>
+            <a:srgbClr val="FEF3C7"/>
+          </a:solidFill>
+          <a:ln w="12700">
+            <a:solidFill>
+              <a:srgbClr val="B45309"/>
+            </a:solidFill>
+            <a:prstDash val="solid"/>
+          </a:ln>
+        </p:spPr>
+      </p:sp>
+      <p:sp>
+        <p:nvSpPr>
+          <p:cNvPr id="16" name="Shape 14"/>
+          <p:cNvSpPr/>
+          <p:nvPr/>
+        </p:nvSpPr>
+        <p:spPr>
+          <a:xfrm>
+            <a:off x="8894013" y="91440"/>
+            <a:ext cx="27432" cy="274320"/>
+          </a:xfrm>
+          <a:prstGeom prst="rect">
+            <a:avLst/>
+          </a:prstGeom>
+          <a:solidFill>
+            <a:srgbClr val="B45309"/>
+          </a:solidFill>
+          <a:ln w="12700">
+            <a:solidFill>
+              <a:srgbClr val="B45309"/>
+            </a:solidFill>
+            <a:prstDash val="solid"/>
+          </a:ln>
+        </p:spPr>
+      </p:sp>
+      <p:sp>
+        <p:nvSpPr>
+          <p:cNvPr id="17" name="Shape 15"/>
+          <p:cNvSpPr/>
+          <p:nvPr/>
+        </p:nvSpPr>
+        <p:spPr>
+          <a:xfrm>
+            <a:off x="8948877" y="91440"/>
+            <a:ext cx="27432" cy="274320"/>
+          </a:xfrm>
+          <a:prstGeom prst="rect">
+            <a:avLst/>
+          </a:prstGeom>
+          <a:solidFill>
+            <a:srgbClr val="B45309"/>
+          </a:solidFill>
+          <a:ln w="12700">
+            <a:solidFill>
+              <a:srgbClr val="B45309"/>
+            </a:solidFill>
+            <a:prstDash val="solid"/>
+          </a:ln>
+        </p:spPr>
+      </p:sp>
+      <p:pic>
+        <p:nvPicPr>
+          <p:cNvPr id="18" name="Image 0" descr="preencoded.png">    </p:cNvPr>
+          <p:cNvPicPr>
+            <a:picLocks noChangeAspect="1"/>
+          </p:cNvPicPr>
+          <p:nvPr/>
+        </p:nvPicPr>
+        <p:blipFill>
+          <a:blip r:embed="rId1"/>
+          <a:stretch>
+            <a:fillRect/>
+          </a:stretch>
+        </p:blipFill>
+        <p:spPr>
+          <a:xfrm>
+            <a:off x="9022029" y="128016"/>
+            <a:ext cx="201168" cy="201168"/>
+          </a:xfrm>
+          <a:prstGeom prst="rect">
+            <a:avLst/>
+          </a:prstGeom>
+        </p:spPr>
+      </p:pic>
+      <p:sp>
+        <p:nvSpPr>
+          <p:cNvPr id="19" name="Text 16"/>
+          <p:cNvSpPr txBox="1"/>
+          <p:nvPr/>
+        </p:nvSpPr>
+        <p:spPr>
+          <a:xfrm>
+            <a:off x="9278061" y="91440"/>
+            <a:ext cx="2328418" cy="274320"/>
+          </a:xfrm>
+          <a:prstGeom prst="rect">
+            <a:avLst/>
+          </a:prstGeom>
+          <a:noFill/>
+          <a:ln/>
+        </p:spPr>
+        <p:txBody>
+          <a:bodyPr wrap="square" lIns="0" tIns="0" rIns="0" bIns="0" rtlCol="0" anchor="ctr"/>
+          <a:lstStyle/>
+          <a:p>
+            <a:pPr indent="0" marL="0">
+              <a:buNone/>
+            </a:pPr>
+            <a:r>
+              <a:rPr lang="en-US" sz="1100" b="1" dirty="0">
+                <a:solidFill>
+                  <a:srgbClr val="92400E"/>
+                </a:solidFill>
+                <a:latin typeface="Calibri" pitchFamily="34" charset="0"/>
+                <a:ea typeface="Calibri" pitchFamily="34" charset="-122"/>
+                <a:cs typeface="Calibri" pitchFamily="34" charset="-120"/>
+              </a:rPr>
+              <a:t>USE NOW</a:t>
+            </a:r>
+            <a:pPr indent="0" marL="0">
+              <a:buNone/>
+            </a:pPr>
+            <a:r>
+              <a:rPr lang="en-US" sz="1100" dirty="0">
+                <a:solidFill>
+                  <a:srgbClr val="92400E"/>
+                </a:solidFill>
+                <a:latin typeface="Calibri" pitchFamily="34" charset="0"/>
+                <a:ea typeface="Calibri" pitchFamily="34" charset="-122"/>
+                <a:cs typeface="Calibri" pitchFamily="34" charset="-120"/>
+              </a:rPr>
+              <a:t> · the PRG32-QT debugger</a:t>
+            </a:r>
+            <a:endParaRPr lang="en-US" sz="1100" dirty="0"/>
           </a:p>
         </p:txBody>
       </p:sp>
@@ -14343,6 +15451,158 @@
               <a:t>s1 is 0x10 in one frame only: the frame in which the button goes down.</a:t>
             </a:r>
             <a:endParaRPr lang="en-US" sz="1500" dirty="0"/>
+          </a:p>
+        </p:txBody>
+      </p:sp>
+      <p:sp>
+        <p:nvSpPr>
+          <p:cNvPr id="5" name="Shape 2"/>
+          <p:cNvSpPr/>
+          <p:nvPr/>
+        </p:nvSpPr>
+        <p:spPr>
+          <a:xfrm>
+            <a:off x="8894013" y="91440"/>
+            <a:ext cx="2749042" cy="274320"/>
+          </a:xfrm>
+          <a:prstGeom prst="rect">
+            <a:avLst/>
+          </a:prstGeom>
+          <a:solidFill>
+            <a:srgbClr val="FEF3C7"/>
+          </a:solidFill>
+          <a:ln w="12700">
+            <a:solidFill>
+              <a:srgbClr val="B45309"/>
+            </a:solidFill>
+            <a:prstDash val="solid"/>
+          </a:ln>
+        </p:spPr>
+      </p:sp>
+      <p:sp>
+        <p:nvSpPr>
+          <p:cNvPr id="6" name="Shape 3"/>
+          <p:cNvSpPr/>
+          <p:nvPr/>
+        </p:nvSpPr>
+        <p:spPr>
+          <a:xfrm>
+            <a:off x="8894013" y="91440"/>
+            <a:ext cx="27432" cy="274320"/>
+          </a:xfrm>
+          <a:prstGeom prst="rect">
+            <a:avLst/>
+          </a:prstGeom>
+          <a:solidFill>
+            <a:srgbClr val="B45309"/>
+          </a:solidFill>
+          <a:ln w="12700">
+            <a:solidFill>
+              <a:srgbClr val="B45309"/>
+            </a:solidFill>
+            <a:prstDash val="solid"/>
+          </a:ln>
+        </p:spPr>
+      </p:sp>
+      <p:sp>
+        <p:nvSpPr>
+          <p:cNvPr id="7" name="Shape 4"/>
+          <p:cNvSpPr/>
+          <p:nvPr/>
+        </p:nvSpPr>
+        <p:spPr>
+          <a:xfrm>
+            <a:off x="8948877" y="91440"/>
+            <a:ext cx="27432" cy="274320"/>
+          </a:xfrm>
+          <a:prstGeom prst="rect">
+            <a:avLst/>
+          </a:prstGeom>
+          <a:solidFill>
+            <a:srgbClr val="B45309"/>
+          </a:solidFill>
+          <a:ln w="12700">
+            <a:solidFill>
+              <a:srgbClr val="B45309"/>
+            </a:solidFill>
+            <a:prstDash val="solid"/>
+          </a:ln>
+        </p:spPr>
+      </p:sp>
+      <p:pic>
+        <p:nvPicPr>
+          <p:cNvPr id="8" name="Image 0" descr="preencoded.png">    </p:cNvPr>
+          <p:cNvPicPr>
+            <a:picLocks noChangeAspect="1"/>
+          </p:cNvPicPr>
+          <p:nvPr/>
+        </p:nvPicPr>
+        <p:blipFill>
+          <a:blip r:embed="rId1"/>
+          <a:stretch>
+            <a:fillRect/>
+          </a:stretch>
+        </p:blipFill>
+        <p:spPr>
+          <a:xfrm>
+            <a:off x="9022029" y="128016"/>
+            <a:ext cx="201168" cy="201168"/>
+          </a:xfrm>
+          <a:prstGeom prst="rect">
+            <a:avLst/>
+          </a:prstGeom>
+        </p:spPr>
+      </p:pic>
+      <p:sp>
+        <p:nvSpPr>
+          <p:cNvPr id="9" name="Text 5"/>
+          <p:cNvSpPr txBox="1"/>
+          <p:nvPr/>
+        </p:nvSpPr>
+        <p:spPr>
+          <a:xfrm>
+            <a:off x="9278061" y="91440"/>
+            <a:ext cx="2328418" cy="274320"/>
+          </a:xfrm>
+          <a:prstGeom prst="rect">
+            <a:avLst/>
+          </a:prstGeom>
+          <a:noFill/>
+          <a:ln/>
+        </p:spPr>
+        <p:txBody>
+          <a:bodyPr wrap="square" lIns="0" tIns="0" rIns="0" bIns="0" rtlCol="0" anchor="ctr"/>
+          <a:lstStyle/>
+          <a:p>
+            <a:pPr indent="0" marL="0">
+              <a:buNone/>
+            </a:pPr>
+            <a:r>
+              <a:rPr lang="en-US" sz="1100" b="1" dirty="0">
+                <a:solidFill>
+                  <a:srgbClr val="92400E"/>
+                </a:solidFill>
+                <a:latin typeface="Calibri" pitchFamily="34" charset="0"/>
+                <a:ea typeface="Calibri" pitchFamily="34" charset="-122"/>
+                <a:cs typeface="Calibri" pitchFamily="34" charset="-120"/>
+              </a:rPr>
+              <a:t>USE NOW</a:t>
+            </a:r>
+            <a:pPr indent="0" marL="0">
+              <a:buNone/>
+            </a:pPr>
+            <a:r>
+              <a:rPr lang="en-US" sz="1100" dirty="0">
+                <a:solidFill>
+                  <a:srgbClr val="92400E"/>
+                </a:solidFill>
+                <a:latin typeface="Calibri" pitchFamily="34" charset="0"/>
+                <a:ea typeface="Calibri" pitchFamily="34" charset="-122"/>
+                <a:cs typeface="Calibri" pitchFamily="34" charset="-120"/>
+              </a:rPr>
+              <a:t> · the PRG32-QT debugger</a:t>
+            </a:r>
+            <a:endParaRPr lang="en-US" sz="1100" dirty="0"/>
           </a:p>
         </p:txBody>
       </p:sp>

--- a/en/slides/17-Computer_Architecture-Verm1_Part_3.pptx
+++ b/en/slides/17-Computer_Architecture-Verm1_Part_3.pptx
@@ -119,7 +119,7 @@
   <p:extLst>
     <p:ext uri="{521415D9-36F7-43E2-AB2F-B90AF26B5E84}">
       <p14:sectionLst xmlns:p14="http://schemas.microsoft.com/office/powerpoint/2010/main">
-        <p14:section name="Opening" id="{535693cb-6635-772a-1a37-9e81daf21991}">
+        <p14:section name="Opening" id="{56695093-abf2-637a-4c21-bdd5627f59e5}">
           <p14:sldIdLst>
             <p14:sldId id="256"/>
             <p14:sldId id="257"/>
@@ -127,14 +127,14 @@
             <p14:sldId id="259"/>
           </p14:sldIdLst>
         </p14:section>
-        <p14:section name="The design, before the code" id="{1ccac3a7-1ba2-b083-64b7-ea78ddc47b58}">
+        <p14:section name="The design, before the code" id="{f08ae81f-1bc6-388d-5ae7-41941bf71226}">
           <p14:sldIdLst>
             <p14:sldId id="260"/>
             <p14:sldId id="261"/>
             <p14:sldId id="262"/>
           </p14:sldIdLst>
         </p14:section>
-        <p14:section name="Step 5: look at memory move" id="{e5cd6e3b-e683-3ca6-93df-c6fc3469c8c4}">
+        <p14:section name="Step 5: look at memory move" id="{75a8d0e4-7b90-958b-cbc9-47811313499a}">
           <p14:sldIdLst>
             <p14:sldId id="263"/>
             <p14:sldId id="264"/>

--- a/en/slides/17-Computer_Architecture-Verm1_Part_3.pptx
+++ b/en/slides/17-Computer_Architecture-Verm1_Part_3.pptx
@@ -119,7 +119,7 @@
   <p:extLst>
     <p:ext uri="{521415D9-36F7-43E2-AB2F-B90AF26B5E84}">
       <p14:sectionLst xmlns:p14="http://schemas.microsoft.com/office/powerpoint/2010/main">
-        <p14:section name="Opening" id="{56695093-abf2-637a-4c21-bdd5627f59e5}">
+        <p14:section name="Opening" id="{e5073baf-0220-5469-569b-cbfbead14b57}">
           <p14:sldIdLst>
             <p14:sldId id="256"/>
             <p14:sldId id="257"/>
@@ -127,14 +127,14 @@
             <p14:sldId id="259"/>
           </p14:sldIdLst>
         </p14:section>
-        <p14:section name="The design, before the code" id="{f08ae81f-1bc6-388d-5ae7-41941bf71226}">
+        <p14:section name="The design, before the code" id="{33ff835e-814c-0078-32e8-ea1ad912ecfe}">
           <p14:sldIdLst>
             <p14:sldId id="260"/>
             <p14:sldId id="261"/>
             <p14:sldId id="262"/>
           </p14:sldIdLst>
         </p14:section>
-        <p14:section name="Step 5: look at memory move" id="{75a8d0e4-7b90-958b-cbc9-47811313499a}">
+        <p14:section name="Step 5: look at memory move" id="{053210a0-d268-9a83-f7db-0b56a01e7a27}">
           <p14:sldIdLst>
             <p14:sldId id="263"/>
             <p14:sldId id="264"/>
@@ -548,7 +548,7 @@
           <a:p>
             <a:r>
               <a:rPr lang="en-US" dirty="0"/>
-              <a:t>The third tutorial turns Verm1 into a real game. Until now the worm was a single cell and nothing could go wrong. Today memory enters the project: the worm gets a body that follows the head and grows, biting itself ends the game, and the program acquires a title screen and a game-over screen. Brooks's sentence on the cover is the motto of the day: choose the data structures well, and the code almost writes itself. You will meet two of them, a ring and a map.
+              <a:t>The third tutorial turns Verm1 into a genuine game. Until now the worm was a single cell and nothing could go wrong. Today memory enters the project: the worm acquires a body that follows the head and grows, biting itself ends the game, and the program gains a title screen and a game-over screen. Fred Brooks's sentence on the cover is the guiding principle of the session: choose the data structures well, and the code nearly writes itself. Two such structures are introduced, a ring and a map, and the tutorial is in large part a study of how their design shapes the code.
 Learning status: UNDERSTAND NOW, by the end of this lecture you explain it, trace it and apply it on your own; USE NOW, you follow and use the recipe today; how it works inside is explained later, or is not part of the course; UNDERSTAND LATER, recognise the name and what it is for; a later lecture explains it. A slide without a badge is context: a story, an example, a question, an exercise.
 Learning status of this lecture. UNDERSTAND NOW: arrays in memory; finite-state machines; .text, .rodata, .data; latches and flip-flops; fixed point. USE NOW: the calling convention (Lecture 18) and, used without being studied in this course, the PRG32 tools, the PRG32-QT debugger. UNDERSTAND LATER: nothing. A slide without a badge is context: a story, an example, a question, an exercise.
 For the lecturer: Third project tutorial. It uses Lectures 13 to 16: finite state machines and edge detection (13), registers that hold the previous value (14), memory as an array of bytes, addresses and indices (15), what is kept in the cartridge file and what is lost at power-off (16). The reference file is verm1/verm1_part3.S. The quotation is the second half of Brooks's remark on flowcharts and tables: with 'data structures' for 'tables' it is the motto of this part.</a:t>
@@ -639,7 +639,7 @@
           <a:p>
             <a:r>
               <a:rPr lang="en-US" dirty="0"/>
-              <a:t>Three questions to answer with the debugger. Where is state, and what does it contain while you play and lose? Is the map consistent with the ring: does the byte at row times 40 plus column of the head contain 1? What did the fatal step see: at the lbu after the second mul in step, t1 is 1 exactly once, at the bite. The last line is a principle: a program is right when its memory is right.
+              <a:t>Three questions to be answered with the debugger. Where is state, and what does it contain during play and after losing? Is the map consistent with the ring, that is, does the byte at row × 40 + column of the head contain 1? What did the fatal step observe: at the lbu after the second mul in step, t1 is 1 exactly once, at the bite. The last line states a principle that generalises well beyond this game: a program is correct when its memory is correct, and its invariants are what make memory checkable.
 USE NOW: the PRG32-QT debugger (used, not studied, in this course).
 For the lecturer: The third question is the most instructive: s0 and s1 hold the cell the head wanted to enter, and the screen shows that it is part of the body.</a:t>
             </a:r>
@@ -729,8 +729,8 @@
           <a:p>
             <a:r>
               <a:rPr lang="en-US" dirty="0"/>
-              <a:t>Compute the tail first: head_i - length + 1 is 1 minus 4 plus 1, minus 2. Masked with 255 it becomes 254. From there count four entries forward, wrapping after 255.
-The formula of the map: row times 40 plus column. Do not swap the two: the option with 283 is 7 times 40 plus 3.
+              <a:t>For the first question the tail is computed first: head_i - length + 1 is 1 - 4 + 1 = -2, which masked with 255 becomes 254. From there four entries are counted forwards, wrapping after 255.
+For the second, the formula of the map applies: row × 40 + column. The two must not be interchanged; the option with 283 is 7 × 40 + 3.
 For the lecturer: 1. Answer: C. From the tail, head_i - length + 1 = -2, that is 254 after AND 255, up to the head: 254, 255, 0, 1.
 2. Answer: B. 3 x 40 + 7 = 127.</a:t>
             </a:r>
@@ -820,8 +820,8 @@
           <a:p>
             <a:r>
               <a:rPr lang="en-US" dirty="0"/>
-              <a:t>Think in terms of edges. A is down for many frames, but only in the first of them is it "down now and up one frame ago".
-In one step the tail leaves a cell and the head enters one. If they are the same cell, which of the two operations must be done first for the move to be legal?
+              <a:t>For the first question one reasons in terms of edges. A is down for many frames, but only in the first of them is it "down now and up one frame ago".
+For the second: in one step the tail vacates a cell and the head enters one. If they are the same cell, the question is which of the two operations must come first for the move to be legal.
 For the lecturer: 1. Answer: B. Only the frame in which A goes down gives s1 = 0x10: one edge, one transition.
 2. Answer: B. In the same step the tail moves away: that cell is free for the head.</a:t>
             </a:r>
@@ -911,7 +911,7 @@
           <a:p>
             <a:r>
               <a:rPr lang="en-US" dirty="0"/>
-              <a:t>Where you are. Verm1 is now a game, with a goal, a risk, a beginning and an end, and you can explain every line of it. It is sequential logic and memory written as a program: a machine with three states, a ring of bytes, a map. Three things are still rough: the whole screen is redrawn at every frame, the score is a row of marks, the speed never changes. The next four lectures open the machine that runs your code, and Part 4 finishes the game.
+              <a:t>The current position. Verm1 is now a game, with an objective, a risk, a beginning and an end, and every line of it can be explained. It is sequential logic and memory expressed as a program: a machine with three states, a ring of bytes, a map. Three aspects remain rough: the whole screen is redrawn at every frame, the score is a row of marks, and the speed never changes. The next four lectures open the machine that executes the code, and Part 4 completes the game.
 Learning status, recap. UNDERSTAND NOW: arrays in memory; finite-state machines; .text, .rodata, .data; latches and flip-flops; fixed point. USE NOW: the calling convention (Lecture 18) and, used without being studied in this course, the PRG32 tools, the PRG32-QT debugger. UNDERSTAND LATER: nothing. A slide without a badge is context: a story, an example, a question, an exercise.
 For the lecturer: The students now have about 450 lines of assembly that they wrote and can explain. The next four lectures open the machine that runs them.</a:t>
             </a:r>
@@ -1001,7 +1001,7 @@
           <a:p>
             <a:r>
               <a:rPr lang="en-US" dirty="0"/>
-              <a:t>Five results. A worm with a body that follows the head and grows by one cell at every meal. A game that can be lost. Three screens, title, game and game over, linked by button A. Food that never appears on the worm. And a best score, kept as long as the cartridge stays in memory. It is the largest step of the project: the file roughly doubles in length, so follow the steps and run the program every time a slide says so.</a:t>
+              <a:t>Five outcomes. A worm with a body that follows the head and grows by one cell at every meal. A game that can be lost. Three screens, title, game and game over, linked by button A. Food that never appears on the worm. And a best score, retained as long as the cartridge remains in memory. This is the largest step of the project: the file roughly doubles in length, so the steps should be followed in order and the program run whenever a slide calls for it.</a:t>
             </a:r>
             <a:endParaRPr lang="en-US" dirty="0"/>
           </a:p>
@@ -1089,7 +1089,7 @@
           <a:p>
             <a:r>
               <a:rPr lang="en-US" dirty="0"/>
-              <a:t>The ideas of the block on state and memory, and where they appear today. The finite-state machine of Lecture 13 becomes the three states of the game. The edge, a change and not a level, becomes "A pressed now and not one frame ago". The register that keeps a value for the next clock becomes prev_btn. Memory as an array of bytes becomes the body and the map of the world. And the difference between what stays in the file and what lives in RAM becomes .rodata, .data and the best score.
+              <a:t>The ideas of the block on state and memory, and where they appear today. The finite-state machine of Lecture 13 becomes the three states of the game. The edge, a change rather than a level, becomes "A pressed now and not one frame ago". The register that holds a value until the next clock becomes prev_btn. Memory as an array of bytes, from Lecture 15, becomes the body and the map of the world. And the distinction between what stays in the file and what lives in RAM, from Lecture 16, becomes .rodata, .data and the best score.
 For the lecturer: The frame is the clock of our machine: update computes the next state from the present state and the inputs, exactly as in Lecture 13.</a:t>
             </a:r>
             <a:endParaRPr lang="en-US" dirty="0"/>
@@ -1178,7 +1178,7 @@
           <a:p>
             <a:r>
               <a:rPr lang="en-US" dirty="0"/>
-              <a:t>The three screens you are going to build: the title with its invitation, the game with a worm of seven cells after four meals, and the game over. They are one program in three states. Start from a Part 2 that runs; if yours does not, copy the reference file of Part 2.
+              <a:t>The three screens to be built: the title with its invitation, the game with a worm of seven cells after four meals, and the game-over screen. They are one program in three states. The session begins from a working Part 2; a student whose file does not run copies the reference file of Part 2.
 For the lecturer: Screenshots produced by tools/tests/verm1_check.py with a scripted player.</a:t>
             </a:r>
             <a:endParaRPr lang="en-US" dirty="0"/>
@@ -1267,7 +1267,7 @@
           <a:p>
             <a:r>
               <a:rPr lang="en-US" dirty="0"/>
-              <a:t>The body is stored in two arrays of 256 bytes, body_x and body_y: entry k holds the column and the row of one segment. Nothing is ever shifted. Two numbers describe the worm: head_i, the entry of the head, and length, the number of entries in use; the tail is entry head_i - length + 1. A step writes one new entry after the head and advances head_i. If the worm has eaten the tail stays; otherwise it advances too. After entry 255 comes entry 0, which is an AND with 255: the array is a ring.
+              <a:t>The body is stored in two arrays of 256 bytes, body_x and body_y, entry k holding the column and row of one segment. Nothing is ever shifted. Two numbers describe the worm: head_i, the index of the head, and length, the number of entries in use, so that the tail is entry head_i - length + 1. A step writes one new entry after the head and advances head_i; if the worm has eaten the tail stays, otherwise it advances too. After entry 255 comes entry 0, an AND with 255: the array is a ring, or circular buffer. Each step costs constant time, whatever the length of the worm.
 UNDERSTAND NOW: arrays in memory.
 For the lecturer: A circular buffer, the structure behind every FIFO (first in, first out) queue; the address arithmetic is that of Lecture 15. Moving a worm of 200 cells costs the same as moving one of 3. The size 256 is chosen so that the wrap is one AND: a power of two.</a:t>
             </a:r>
@@ -1357,7 +1357,7 @@
           <a:p>
             <a:r>
               <a:rPr lang="en-US" dirty="0"/>
-              <a:t>To know whether the new head touches the body, the program could compare it with every segment: up to 255 comparisons at each step. Instead it keeps a map of the world: one byte for each of the 960 cells, 1 if a segment is there and 0 if not. The cell in column c of row r is byte number r times 40 plus c. A step sets one byte and clears one, and the collision test becomes a single load. It is the classic exchange of memory for time. The price: map and ring must always agree.
+              <a:t>To determine whether the new head touches the body, the program could compare it with every segment, up to 255 comparisons per step. It keeps instead a map of the world: one byte for each of the 960 cells, 1 if a segment occupies it and 0 otherwise. The cell in column c of row r is byte r × 40 + c. A step sets one byte and clears another, and the collision test becomes a single load. This is the classic trade of memory for time. Its price is an invariant that must be maintained: map and ring must always agree.
 UNDERSTAND NOW: arrays in memory.
 For the lecturer: Memory for time: the classic exchange. The map and the ring say the same thing in two ways, and the program must keep them consistent: every write to one is paired with a write to the other.</a:t>
             </a:r>
@@ -1447,7 +1447,7 @@
           <a:p>
             <a:r>
               <a:rPr lang="en-US" dirty="0"/>
-              <a:t>The state diagram of the game, as in Lecture 13: TITLE goes to PLAY when A is pressed; PLAY goes to OVER when the worm bites itself; OVER goes back to TITLE when A is pressed. The table adds the action of each transition. One detail decides whether the machine works: "A pressed" means down now and up one frame ago, an edge and not a level. Otherwise holding A would run through the states one per frame.
+              <a:t>The state diagram of the game, as in Lecture 13: TITLE passes to PLAY when A is pressed; PLAY passes to OVER when the worm bites itself; OVER returns to TITLE when A is pressed. The table adds the action associated with each transition. One detail determines whether the machine works: "A pressed" must mean down now and up one frame ago, an edge rather than a level. Otherwise holding A would traverse the states at one per frame, the defect anticipated in the warm-up of Lecture 13.
 UNDERSTAND NOW: finite-state machines.
 For the lecturer: The diagram and the table of Lecture 13, for our game. In every other case the state does not change. Draw it on the board before showing the code: the code is a transcription.</a:t>
             </a:r>
@@ -1537,7 +1537,7 @@
           <a:p>
             <a:r>
               <a:rPr lang="en-US" dirty="0"/>
-              <a:t>Put a breakpoint on the first instruction of step and resume: the program now stops once per step of the worm. Open the memory at the address of body_x: after the initial 03 04 05 a new byte appears at each step. Turn downwards: body_x repeats the same column, while body_y, 256 bytes further on, counts the rows. Eat, and compare head_i and length before and after: both have grown by one. The old bytes are never erased: the ring holds the history of the last 256 steps.
+              <a:t>A breakpoint is placed on the first instruction of step and execution resumed: the program now halts once per step of the worm. The memory view is opened at the address of body_x: after the initial 03 04 05, a new byte appears at each step. Turning downwards, body_x repeats the same column while body_y, 256 bytes further on, counts the rows. After a meal, head_i and length are compared before and after: both have increased by one. The old bytes are never erased, so the ring records the history of the last 256 steps.
 USE NOW: the PRG32-QT debugger (used, not studied, in this course).
 For the lecturer: The bytes of the old positions are never erased: the ring keeps the whole history of the last 256 steps, and length says how much of it is still worm. After 256 steps the writing starts again from the first byte.</a:t>
             </a:r>
@@ -1627,7 +1627,7 @@
           <a:p>
             <a:r>
               <a:rPr lang="en-US" dirty="0"/>
-              <a:t>The edge of button A, frame by frame. While A is up everything is zero. In the frame in which A goes down, s0 is 0x10 and prev_btn is still 0: the AND with the negation gives 0x10, and the transition happens. In the following frames A is still down, but prev_btn is now 0x10 too, and the result is zero. One edge, one transition, however long the button is held.
+              <a:t>The edge of button A, frame by frame. While A is up, everything is zero. In the frame in which A goes down, s0 is 0x10 and prev_btn is still 0: the AND with the negation yields 0x10, and the transition occurs. In subsequent frames A remains down, but prev_btn is now 0x10 as well, and the result is zero. One edge, one transition, however long the button is held: the edge detector of Lecture 13, with a word of memory as the flip-flop and the frame as the clock.
 USE NOW: the PRG32-QT debugger (used, not studied, in this course).
 For the lecturer: Put a breakpoint on and s1, s0, t1 in verm1_update, hold A and press Resume three times: s1 is 0x10 in one frame only. The test of the reference file holds A for 28 frames and checks that exactly one transition happens.</a:t>
             </a:r>
@@ -2746,7 +2746,7 @@
                 <a:ea typeface="Calibri" pitchFamily="34" charset="-122"/>
                 <a:cs typeface="Calibri" pitchFamily="34" charset="-120"/>
               </a:rPr>
-              <a:t>17-Computer_Architecture-Verm1_Part_3-Code.pptx</a:t>
+              <a:t>17-Computer_Architecture-Verm1_Part_3-Lab.pptx</a:t>
             </a:r>
             <a:endParaRPr lang="en-US" sz="1300" dirty="0"/>
           </a:p>

--- a/en/slides/17-Computer_Architecture-Verm1_Part_3.pptx
+++ b/en/slides/17-Computer_Architecture-Verm1_Part_3.pptx
@@ -119,7 +119,7 @@
   <p:extLst>
     <p:ext uri="{521415D9-36F7-43E2-AB2F-B90AF26B5E84}">
       <p14:sectionLst xmlns:p14="http://schemas.microsoft.com/office/powerpoint/2010/main">
-        <p14:section name="Opening" id="{e5073baf-0220-5469-569b-cbfbead14b57}">
+        <p14:section name="Opening" id="{cf77e674-fa8f-aac3-329b-81eae014af18}">
           <p14:sldIdLst>
             <p14:sldId id="256"/>
             <p14:sldId id="257"/>
@@ -127,14 +127,14 @@
             <p14:sldId id="259"/>
           </p14:sldIdLst>
         </p14:section>
-        <p14:section name="The design, before the code" id="{33ff835e-814c-0078-32e8-ea1ad912ecfe}">
+        <p14:section name="The design, before the code" id="{63fe2999-d9cc-cc0b-8f2e-a16739523ee9}">
           <p14:sldIdLst>
             <p14:sldId id="260"/>
             <p14:sldId id="261"/>
             <p14:sldId id="262"/>
           </p14:sldIdLst>
         </p14:section>
-        <p14:section name="Step 5: look at memory move" id="{053210a0-d268-9a83-f7db-0b56a01e7a27}">
+        <p14:section name="Step 5: look at memory move" id="{35db328a-2649-c49d-66e1-675848a80d6e}">
           <p14:sldIdLst>
             <p14:sldId id="263"/>
             <p14:sldId id="264"/>

--- a/en/slides/17-Computer_Architecture-Verm1_Part_3.pptx
+++ b/en/slides/17-Computer_Architecture-Verm1_Part_3.pptx
@@ -119,7 +119,7 @@
   <p:extLst>
     <p:ext uri="{521415D9-36F7-43E2-AB2F-B90AF26B5E84}">
       <p14:sectionLst xmlns:p14="http://schemas.microsoft.com/office/powerpoint/2010/main">
-        <p14:section name="Opening" id="{cf77e674-fa8f-aac3-329b-81eae014af18}">
+        <p14:section name="Opening" id="{f5e3b765-5eca-afec-4864-567d3315e4be}">
           <p14:sldIdLst>
             <p14:sldId id="256"/>
             <p14:sldId id="257"/>
@@ -127,14 +127,14 @@
             <p14:sldId id="259"/>
           </p14:sldIdLst>
         </p14:section>
-        <p14:section name="The design, before the code" id="{63fe2999-d9cc-cc0b-8f2e-a16739523ee9}">
+        <p14:section name="The design, before the code" id="{889f849f-a162-5e12-34bb-0279c67f7141}">
           <p14:sldIdLst>
             <p14:sldId id="260"/>
             <p14:sldId id="261"/>
             <p14:sldId id="262"/>
           </p14:sldIdLst>
         </p14:section>
-        <p14:section name="Step 5: look at memory move" id="{35db328a-2649-c49d-66e1-675848a80d6e}">
+        <p14:section name="Step 5: look at memory move" id="{de226359-bc53-d3ff-09b4-15c68047605f}">
           <p14:sldIdLst>
             <p14:sldId id="263"/>
             <p14:sldId id="264"/>
@@ -551,6 +551,7 @@
               <a:t>The third tutorial turns Verm1 into a genuine game. Until now the worm was a single cell and nothing could go wrong. Today memory enters the project: the worm acquires a body that follows the head and grows, biting itself ends the game, and the program gains a title screen and a game-over screen. Fred Brooks's sentence on the cover is the guiding principle of the session: choose the data structures well, and the code nearly writes itself. Two such structures are introduced, a ring and a map, and the tutorial is in large part a study of how their design shapes the code.
 Learning status: UNDERSTAND NOW, by the end of this lecture you explain it, trace it and apply it on your own; USE NOW, you follow and use the recipe today; how it works inside is explained later, or is not part of the course; UNDERSTAND LATER, recognise the name and what it is for; a later lecture explains it. A slide without a badge is context: a story, an example, a question, an exercise.
 Learning status of this lecture. UNDERSTAND NOW: arrays in memory; finite-state machines; .text, .rodata, .data; latches and flip-flops; fixed point. USE NOW: the calling convention (Lecture 18) and, used without being studied in this course, the PRG32 tools, the PRG32-QT debugger. UNDERSTAND LATER: nothing. A slide without a badge is context: a story, an example, a question, an exercise.
+Roadmap. Today's outcomes: (1) implement the game as a state machine with three states; (2) keep the body in a ring buffer and the grid in an array of bytes; (3) detect a collision by reading the grid. Builds on: arrays in memory (Lecture 04); finite-state machines (Lecture 13); .text, .rodata, .data (Lecture 07); latches and flip-flops (Lecture 13); fixed point (Lecture 06). Next: Lecture 18, The Processor.
 For the lecturer: Third project tutorial. It uses Lectures 13 to 16: finite state machines and edge detection (13), registers that hold the previous value (14), memory as an array of bytes, addresses and indices (15), what is kept in the cartridge file and what is lost at power-off (16). The reference file is verm1/verm1_part3.S. The quotation is the second half of Brooks's remark on flowcharts and tables: with 'data structures' for 'tables' it is the motto of this part.</a:t>
             </a:r>
             <a:endParaRPr lang="en-US" dirty="0"/>
@@ -912,7 +913,7 @@
             <a:r>
               <a:rPr lang="en-US" dirty="0"/>
               <a:t>The current position. Verm1 is now a game, with an objective, a risk, a beginning and an end, and every line of it can be explained. It is sequential logic and memory expressed as a program: a machine with three states, a ring of bytes, a map. Three aspects remain rough: the whole screen is redrawn at every frame, the score is a row of marks, and the speed never changes. The next four lectures open the machine that executes the code, and Part 4 completes the game.
-Learning status, recap. UNDERSTAND NOW: arrays in memory; finite-state machines; .text, .rodata, .data; latches and flip-flops; fixed point. USE NOW: the calling convention (Lecture 18) and, used without being studied in this course, the PRG32 tools, the PRG32-QT debugger. UNDERSTAND LATER: nothing. A slide without a badge is context: a story, an example, a question, an exercise.
+Learning status, recap. UNDERSTAND NOW: arrays in memory; finite-state machines; .text, .rodata, .data; latches and flip-flops; fixed point. USE NOW: the calling convention (Lecture 18) and, used without being studied in this course, the PRG32 tools, the PRG32-QT debugger. UNDERSTAND LATER: nothing. A slide without a badge is context: a story, an example, a question, an exercise. Closing thread: The game now has a memory and states: the sequential machines of Lecture 13, written in software. Next: the processor that runs all of this. Exit ticket (two to four minutes, alone, on paper): 1. Verm1 has three states: TITLE, PLAY, OVER. Draw the transitions and label each with the event that causes it. 2. The body is a ring of 256 entries. head_i is 255 and the worm moves one step. What is the new head_i, and why does Verm1 compute it with andi t1, t1, 255?
 For the lecturer: The students now have about 450 lines of assembly that they wrote and can explain. The next four lectures open the machine that runs them.</a:t>
             </a:r>
             <a:endParaRPr lang="en-US" dirty="0"/>
